--- a/decks/Lowtech-Brand-Deck.pptx
+++ b/decks/Lowtech-Brand-Deck.pptx
@@ -5,16 +5,16 @@
     <p:sldMasterId id="2147483648" r:id="rId1"/>
   </p:sldMasterIdLst>
   <p:sldIdLst>
-    <p:sldId id="256" r:id="rId7"/>
-    <p:sldId id="257" r:id="rId8"/>
-    <p:sldId id="258" r:id="rId9"/>
-    <p:sldId id="259" r:id="rId10"/>
-    <p:sldId id="260" r:id="rId11"/>
-    <p:sldId id="261" r:id="rId12"/>
-    <p:sldId id="262" r:id="rId13"/>
-    <p:sldId id="263" r:id="rId14"/>
+    <p:sldId id="256" r:id="rId2"/>
+    <p:sldId id="257" r:id="rId3"/>
+    <p:sldId id="258" r:id="rId4"/>
+    <p:sldId id="259" r:id="rId5"/>
+    <p:sldId id="260" r:id="rId6"/>
+    <p:sldId id="261" r:id="rId7"/>
+    <p:sldId id="262" r:id="rId8"/>
+    <p:sldId id="263" r:id="rId9"/>
   </p:sldIdLst>
-  <p:sldSz cx="12191695" cy="6858000" type="screen4x3"/>
+  <p:sldSz cx="12192000" cy="6858000"/>
   <p:notesSz cx="6858000" cy="9144000"/>
   <p:defaultTextStyle>
     <a:defPPr>
@@ -111,6 +111,22 @@
       </a:defRPr>
     </a:lvl9pPr>
   </p:defaultTextStyle>
+  <p:extLst>
+    <p:ext uri="{EFAFB233-063F-42B5-8137-9DF3F51BA10A}">
+      <p15:sldGuideLst xmlns:p15="http://schemas.microsoft.com/office/powerpoint/2012/main">
+        <p15:guide id="1" orient="horz" pos="2160">
+          <p15:clr>
+            <a:srgbClr val="A4A3A4"/>
+          </p15:clr>
+        </p15:guide>
+        <p15:guide id="2" pos="2880">
+          <p15:clr>
+            <a:srgbClr val="A4A3A4"/>
+          </p15:clr>
+        </p15:guide>
+      </p15:sldGuideLst>
+    </p:ext>
+  </p:extLst>
 </p:presentation>
 </file>
 
@@ -152,10 +168,9 @@
           <a:lstStyle/>
           <a:p>
             <a:r>
-              <a:rPr lang="en-US" smtClean="0"/>
+              <a:rPr lang="en-US"/>
               <a:t>Click to edit Master title style</a:t>
             </a:r>
-            <a:endParaRPr lang="en-US"/>
           </a:p>
         </p:txBody>
       </p:sp>
@@ -271,10 +286,9 @@
           </a:lstStyle>
           <a:p>
             <a:r>
-              <a:rPr lang="en-US" smtClean="0"/>
+              <a:rPr lang="en-US"/>
               <a:t>Click to edit Master subtitle style</a:t>
             </a:r>
-            <a:endParaRPr lang="en-US"/>
           </a:p>
         </p:txBody>
       </p:sp>
@@ -295,7 +309,7 @@
           <a:p>
             <a:fld id="{5BCAD085-E8A6-8845-BD4E-CB4CCA059FC4}" type="datetimeFigureOut">
               <a:rPr lang="en-US" smtClean="0"/>
-              <a:t>1/27/13</a:t>
+              <a:t>7/1/2026</a:t>
             </a:fld>
             <a:endParaRPr lang="en-US"/>
           </a:p>
@@ -389,10 +403,9 @@
           <a:lstStyle/>
           <a:p>
             <a:r>
-              <a:rPr lang="en-US" smtClean="0"/>
+              <a:rPr lang="en-US"/>
               <a:t>Click to edit Master title style</a:t>
             </a:r>
-            <a:endParaRPr lang="en-US"/>
           </a:p>
         </p:txBody>
       </p:sp>
@@ -413,38 +426,37 @@
           <a:p>
             <a:pPr lvl="0"/>
             <a:r>
-              <a:rPr lang="en-US" smtClean="0"/>
+              <a:rPr lang="en-US"/>
               <a:t>Click to edit Master text styles</a:t>
             </a:r>
           </a:p>
           <a:p>
             <a:pPr lvl="1"/>
             <a:r>
-              <a:rPr lang="en-US" smtClean="0"/>
+              <a:rPr lang="en-US"/>
               <a:t>Second level</a:t>
             </a:r>
           </a:p>
           <a:p>
             <a:pPr lvl="2"/>
             <a:r>
-              <a:rPr lang="en-US" smtClean="0"/>
+              <a:rPr lang="en-US"/>
               <a:t>Third level</a:t>
             </a:r>
           </a:p>
           <a:p>
             <a:pPr lvl="3"/>
             <a:r>
-              <a:rPr lang="en-US" smtClean="0"/>
+              <a:rPr lang="en-US"/>
               <a:t>Fourth level</a:t>
             </a:r>
           </a:p>
           <a:p>
             <a:pPr lvl="4"/>
             <a:r>
-              <a:rPr lang="en-US" smtClean="0"/>
+              <a:rPr lang="en-US"/>
               <a:t>Fifth level</a:t>
             </a:r>
-            <a:endParaRPr lang="en-US"/>
           </a:p>
         </p:txBody>
       </p:sp>
@@ -465,7 +477,7 @@
           <a:p>
             <a:fld id="{5BCAD085-E8A6-8845-BD4E-CB4CCA059FC4}" type="datetimeFigureOut">
               <a:rPr lang="en-US" smtClean="0"/>
-              <a:t>1/27/13</a:t>
+              <a:t>7/1/2026</a:t>
             </a:fld>
             <a:endParaRPr lang="en-US"/>
           </a:p>
@@ -564,10 +576,9 @@
           <a:lstStyle/>
           <a:p>
             <a:r>
-              <a:rPr lang="en-US" smtClean="0"/>
+              <a:rPr lang="en-US"/>
               <a:t>Click to edit Master title style</a:t>
             </a:r>
-            <a:endParaRPr lang="en-US"/>
           </a:p>
         </p:txBody>
       </p:sp>
@@ -593,38 +604,37 @@
           <a:p>
             <a:pPr lvl="0"/>
             <a:r>
-              <a:rPr lang="en-US" smtClean="0"/>
+              <a:rPr lang="en-US"/>
               <a:t>Click to edit Master text styles</a:t>
             </a:r>
           </a:p>
           <a:p>
             <a:pPr lvl="1"/>
             <a:r>
-              <a:rPr lang="en-US" smtClean="0"/>
+              <a:rPr lang="en-US"/>
               <a:t>Second level</a:t>
             </a:r>
           </a:p>
           <a:p>
             <a:pPr lvl="2"/>
             <a:r>
-              <a:rPr lang="en-US" smtClean="0"/>
+              <a:rPr lang="en-US"/>
               <a:t>Third level</a:t>
             </a:r>
           </a:p>
           <a:p>
             <a:pPr lvl="3"/>
             <a:r>
-              <a:rPr lang="en-US" smtClean="0"/>
+              <a:rPr lang="en-US"/>
               <a:t>Fourth level</a:t>
             </a:r>
           </a:p>
           <a:p>
             <a:pPr lvl="4"/>
             <a:r>
-              <a:rPr lang="en-US" smtClean="0"/>
+              <a:rPr lang="en-US"/>
               <a:t>Fifth level</a:t>
             </a:r>
-            <a:endParaRPr lang="en-US"/>
           </a:p>
         </p:txBody>
       </p:sp>
@@ -645,7 +655,7 @@
           <a:p>
             <a:fld id="{5BCAD085-E8A6-8845-BD4E-CB4CCA059FC4}" type="datetimeFigureOut">
               <a:rPr lang="en-US" smtClean="0"/>
-              <a:t>1/27/13</a:t>
+              <a:t>7/1/2026</a:t>
             </a:fld>
             <a:endParaRPr lang="en-US"/>
           </a:p>
@@ -739,10 +749,9 @@
           <a:lstStyle/>
           <a:p>
             <a:r>
-              <a:rPr lang="en-US" smtClean="0"/>
+              <a:rPr lang="en-US"/>
               <a:t>Click to edit Master title style</a:t>
             </a:r>
-            <a:endParaRPr lang="en-US"/>
           </a:p>
         </p:txBody>
       </p:sp>
@@ -763,38 +772,37 @@
           <a:p>
             <a:pPr lvl="0"/>
             <a:r>
-              <a:rPr lang="en-US" smtClean="0"/>
+              <a:rPr lang="en-US"/>
               <a:t>Click to edit Master text styles</a:t>
             </a:r>
           </a:p>
           <a:p>
             <a:pPr lvl="1"/>
             <a:r>
-              <a:rPr lang="en-US" smtClean="0"/>
+              <a:rPr lang="en-US"/>
               <a:t>Second level</a:t>
             </a:r>
           </a:p>
           <a:p>
             <a:pPr lvl="2"/>
             <a:r>
-              <a:rPr lang="en-US" smtClean="0"/>
+              <a:rPr lang="en-US"/>
               <a:t>Third level</a:t>
             </a:r>
           </a:p>
           <a:p>
             <a:pPr lvl="3"/>
             <a:r>
-              <a:rPr lang="en-US" smtClean="0"/>
+              <a:rPr lang="en-US"/>
               <a:t>Fourth level</a:t>
             </a:r>
           </a:p>
           <a:p>
             <a:pPr lvl="4"/>
             <a:r>
-              <a:rPr lang="en-US" smtClean="0"/>
+              <a:rPr lang="en-US"/>
               <a:t>Fifth level</a:t>
             </a:r>
-            <a:endParaRPr lang="en-US"/>
           </a:p>
         </p:txBody>
       </p:sp>
@@ -815,7 +823,7 @@
           <a:p>
             <a:fld id="{5BCAD085-E8A6-8845-BD4E-CB4CCA059FC4}" type="datetimeFigureOut">
               <a:rPr lang="en-US" smtClean="0"/>
-              <a:t>1/27/13</a:t>
+              <a:t>7/1/2026</a:t>
             </a:fld>
             <a:endParaRPr lang="en-US"/>
           </a:p>
@@ -918,10 +926,9 @@
           </a:lstStyle>
           <a:p>
             <a:r>
-              <a:rPr lang="en-US" smtClean="0"/>
+              <a:rPr lang="en-US"/>
               <a:t>Click to edit Master title style</a:t>
             </a:r>
-            <a:endParaRPr lang="en-US"/>
           </a:p>
         </p:txBody>
       </p:sp>
@@ -1038,7 +1045,7 @@
           <a:p>
             <a:pPr lvl="0"/>
             <a:r>
-              <a:rPr lang="en-US" smtClean="0"/>
+              <a:rPr lang="en-US"/>
               <a:t>Click to edit Master text styles</a:t>
             </a:r>
           </a:p>
@@ -1061,7 +1068,7 @@
           <a:p>
             <a:fld id="{5BCAD085-E8A6-8845-BD4E-CB4CCA059FC4}" type="datetimeFigureOut">
               <a:rPr lang="en-US" smtClean="0"/>
-              <a:t>1/27/13</a:t>
+              <a:t>7/1/2026</a:t>
             </a:fld>
             <a:endParaRPr lang="en-US"/>
           </a:p>
@@ -1155,10 +1162,9 @@
           <a:lstStyle/>
           <a:p>
             <a:r>
-              <a:rPr lang="en-US" smtClean="0"/>
+              <a:rPr lang="en-US"/>
               <a:t>Click to edit Master title style</a:t>
             </a:r>
-            <a:endParaRPr lang="en-US"/>
           </a:p>
         </p:txBody>
       </p:sp>
@@ -1212,38 +1218,37 @@
           <a:p>
             <a:pPr lvl="0"/>
             <a:r>
-              <a:rPr lang="en-US" smtClean="0"/>
+              <a:rPr lang="en-US"/>
               <a:t>Click to edit Master text styles</a:t>
             </a:r>
           </a:p>
           <a:p>
             <a:pPr lvl="1"/>
             <a:r>
-              <a:rPr lang="en-US" smtClean="0"/>
+              <a:rPr lang="en-US"/>
               <a:t>Second level</a:t>
             </a:r>
           </a:p>
           <a:p>
             <a:pPr lvl="2"/>
             <a:r>
-              <a:rPr lang="en-US" smtClean="0"/>
+              <a:rPr lang="en-US"/>
               <a:t>Third level</a:t>
             </a:r>
           </a:p>
           <a:p>
             <a:pPr lvl="3"/>
             <a:r>
-              <a:rPr lang="en-US" smtClean="0"/>
+              <a:rPr lang="en-US"/>
               <a:t>Fourth level</a:t>
             </a:r>
           </a:p>
           <a:p>
             <a:pPr lvl="4"/>
             <a:r>
-              <a:rPr lang="en-US" smtClean="0"/>
+              <a:rPr lang="en-US"/>
               <a:t>Fifth level</a:t>
             </a:r>
-            <a:endParaRPr lang="en-US"/>
           </a:p>
         </p:txBody>
       </p:sp>
@@ -1297,38 +1302,37 @@
           <a:p>
             <a:pPr lvl="0"/>
             <a:r>
-              <a:rPr lang="en-US" smtClean="0"/>
+              <a:rPr lang="en-US"/>
               <a:t>Click to edit Master text styles</a:t>
             </a:r>
           </a:p>
           <a:p>
             <a:pPr lvl="1"/>
             <a:r>
-              <a:rPr lang="en-US" smtClean="0"/>
+              <a:rPr lang="en-US"/>
               <a:t>Second level</a:t>
             </a:r>
           </a:p>
           <a:p>
             <a:pPr lvl="2"/>
             <a:r>
-              <a:rPr lang="en-US" smtClean="0"/>
+              <a:rPr lang="en-US"/>
               <a:t>Third level</a:t>
             </a:r>
           </a:p>
           <a:p>
             <a:pPr lvl="3"/>
             <a:r>
-              <a:rPr lang="en-US" smtClean="0"/>
+              <a:rPr lang="en-US"/>
               <a:t>Fourth level</a:t>
             </a:r>
           </a:p>
           <a:p>
             <a:pPr lvl="4"/>
             <a:r>
-              <a:rPr lang="en-US" smtClean="0"/>
+              <a:rPr lang="en-US"/>
               <a:t>Fifth level</a:t>
             </a:r>
-            <a:endParaRPr lang="en-US"/>
           </a:p>
         </p:txBody>
       </p:sp>
@@ -1349,7 +1353,7 @@
           <a:p>
             <a:fld id="{5BCAD085-E8A6-8845-BD4E-CB4CCA059FC4}" type="datetimeFigureOut">
               <a:rPr lang="en-US" smtClean="0"/>
-              <a:t>1/27/13</a:t>
+              <a:t>7/1/2026</a:t>
             </a:fld>
             <a:endParaRPr lang="en-US"/>
           </a:p>
@@ -1447,10 +1451,9 @@
           </a:lstStyle>
           <a:p>
             <a:r>
-              <a:rPr lang="en-US" smtClean="0"/>
+              <a:rPr lang="en-US"/>
               <a:t>Click to edit Master title style</a:t>
             </a:r>
-            <a:endParaRPr lang="en-US"/>
           </a:p>
         </p:txBody>
       </p:sp>
@@ -1513,7 +1516,7 @@
           <a:p>
             <a:pPr lvl="0"/>
             <a:r>
-              <a:rPr lang="en-US" smtClean="0"/>
+              <a:rPr lang="en-US"/>
               <a:t>Click to edit Master text styles</a:t>
             </a:r>
           </a:p>
@@ -1569,38 +1572,37 @@
           <a:p>
             <a:pPr lvl="0"/>
             <a:r>
-              <a:rPr lang="en-US" smtClean="0"/>
+              <a:rPr lang="en-US"/>
               <a:t>Click to edit Master text styles</a:t>
             </a:r>
           </a:p>
           <a:p>
             <a:pPr lvl="1"/>
             <a:r>
-              <a:rPr lang="en-US" smtClean="0"/>
+              <a:rPr lang="en-US"/>
               <a:t>Second level</a:t>
             </a:r>
           </a:p>
           <a:p>
             <a:pPr lvl="2"/>
             <a:r>
-              <a:rPr lang="en-US" smtClean="0"/>
+              <a:rPr lang="en-US"/>
               <a:t>Third level</a:t>
             </a:r>
           </a:p>
           <a:p>
             <a:pPr lvl="3"/>
             <a:r>
-              <a:rPr lang="en-US" smtClean="0"/>
+              <a:rPr lang="en-US"/>
               <a:t>Fourth level</a:t>
             </a:r>
           </a:p>
           <a:p>
             <a:pPr lvl="4"/>
             <a:r>
-              <a:rPr lang="en-US" smtClean="0"/>
+              <a:rPr lang="en-US"/>
               <a:t>Fifth level</a:t>
             </a:r>
-            <a:endParaRPr lang="en-US"/>
           </a:p>
         </p:txBody>
       </p:sp>
@@ -1663,7 +1665,7 @@
           <a:p>
             <a:pPr lvl="0"/>
             <a:r>
-              <a:rPr lang="en-US" smtClean="0"/>
+              <a:rPr lang="en-US"/>
               <a:t>Click to edit Master text styles</a:t>
             </a:r>
           </a:p>
@@ -1719,38 +1721,37 @@
           <a:p>
             <a:pPr lvl="0"/>
             <a:r>
-              <a:rPr lang="en-US" smtClean="0"/>
+              <a:rPr lang="en-US"/>
               <a:t>Click to edit Master text styles</a:t>
             </a:r>
           </a:p>
           <a:p>
             <a:pPr lvl="1"/>
             <a:r>
-              <a:rPr lang="en-US" smtClean="0"/>
+              <a:rPr lang="en-US"/>
               <a:t>Second level</a:t>
             </a:r>
           </a:p>
           <a:p>
             <a:pPr lvl="2"/>
             <a:r>
-              <a:rPr lang="en-US" smtClean="0"/>
+              <a:rPr lang="en-US"/>
               <a:t>Third level</a:t>
             </a:r>
           </a:p>
           <a:p>
             <a:pPr lvl="3"/>
             <a:r>
-              <a:rPr lang="en-US" smtClean="0"/>
+              <a:rPr lang="en-US"/>
               <a:t>Fourth level</a:t>
             </a:r>
           </a:p>
           <a:p>
             <a:pPr lvl="4"/>
             <a:r>
-              <a:rPr lang="en-US" smtClean="0"/>
+              <a:rPr lang="en-US"/>
               <a:t>Fifth level</a:t>
             </a:r>
-            <a:endParaRPr lang="en-US"/>
           </a:p>
         </p:txBody>
       </p:sp>
@@ -1771,7 +1772,7 @@
           <a:p>
             <a:fld id="{5BCAD085-E8A6-8845-BD4E-CB4CCA059FC4}" type="datetimeFigureOut">
               <a:rPr lang="en-US" smtClean="0"/>
-              <a:t>1/27/13</a:t>
+              <a:t>7/1/2026</a:t>
             </a:fld>
             <a:endParaRPr lang="en-US"/>
           </a:p>
@@ -1865,10 +1866,9 @@
           <a:lstStyle/>
           <a:p>
             <a:r>
-              <a:rPr lang="en-US" smtClean="0"/>
+              <a:rPr lang="en-US"/>
               <a:t>Click to edit Master title style</a:t>
             </a:r>
-            <a:endParaRPr lang="en-US"/>
           </a:p>
         </p:txBody>
       </p:sp>
@@ -1889,7 +1889,7 @@
           <a:p>
             <a:fld id="{5BCAD085-E8A6-8845-BD4E-CB4CCA059FC4}" type="datetimeFigureOut">
               <a:rPr lang="en-US" smtClean="0"/>
-              <a:t>1/27/13</a:t>
+              <a:t>7/1/2026</a:t>
             </a:fld>
             <a:endParaRPr lang="en-US"/>
           </a:p>
@@ -1984,7 +1984,7 @@
           <a:p>
             <a:fld id="{5BCAD085-E8A6-8845-BD4E-CB4CCA059FC4}" type="datetimeFigureOut">
               <a:rPr lang="en-US" smtClean="0"/>
-              <a:t>1/27/13</a:t>
+              <a:t>7/1/2026</a:t>
             </a:fld>
             <a:endParaRPr lang="en-US"/>
           </a:p>
@@ -2087,10 +2087,9 @@
           </a:lstStyle>
           <a:p>
             <a:r>
-              <a:rPr lang="en-US" smtClean="0"/>
+              <a:rPr lang="en-US"/>
               <a:t>Click to edit Master title style</a:t>
             </a:r>
-            <a:endParaRPr lang="en-US"/>
           </a:p>
         </p:txBody>
       </p:sp>
@@ -2144,38 +2143,37 @@
           <a:p>
             <a:pPr lvl="0"/>
             <a:r>
-              <a:rPr lang="en-US" smtClean="0"/>
+              <a:rPr lang="en-US"/>
               <a:t>Click to edit Master text styles</a:t>
             </a:r>
           </a:p>
           <a:p>
             <a:pPr lvl="1"/>
             <a:r>
-              <a:rPr lang="en-US" smtClean="0"/>
+              <a:rPr lang="en-US"/>
               <a:t>Second level</a:t>
             </a:r>
           </a:p>
           <a:p>
             <a:pPr lvl="2"/>
             <a:r>
-              <a:rPr lang="en-US" smtClean="0"/>
+              <a:rPr lang="en-US"/>
               <a:t>Third level</a:t>
             </a:r>
           </a:p>
           <a:p>
             <a:pPr lvl="3"/>
             <a:r>
-              <a:rPr lang="en-US" smtClean="0"/>
+              <a:rPr lang="en-US"/>
               <a:t>Fourth level</a:t>
             </a:r>
           </a:p>
           <a:p>
             <a:pPr lvl="4"/>
             <a:r>
-              <a:rPr lang="en-US" smtClean="0"/>
+              <a:rPr lang="en-US"/>
               <a:t>Fifth level</a:t>
             </a:r>
-            <a:endParaRPr lang="en-US"/>
           </a:p>
         </p:txBody>
       </p:sp>
@@ -2238,7 +2236,7 @@
           <a:p>
             <a:pPr lvl="0"/>
             <a:r>
-              <a:rPr lang="en-US" smtClean="0"/>
+              <a:rPr lang="en-US"/>
               <a:t>Click to edit Master text styles</a:t>
             </a:r>
           </a:p>
@@ -2261,7 +2259,7 @@
           <a:p>
             <a:fld id="{5BCAD085-E8A6-8845-BD4E-CB4CCA059FC4}" type="datetimeFigureOut">
               <a:rPr lang="en-US" smtClean="0"/>
-              <a:t>1/27/13</a:t>
+              <a:t>7/1/2026</a:t>
             </a:fld>
             <a:endParaRPr lang="en-US"/>
           </a:p>
@@ -2364,10 +2362,9 @@
           </a:lstStyle>
           <a:p>
             <a:r>
-              <a:rPr lang="en-US" smtClean="0"/>
+              <a:rPr lang="en-US"/>
               <a:t>Click to edit Master title style</a:t>
             </a:r>
-            <a:endParaRPr lang="en-US"/>
           </a:p>
         </p:txBody>
       </p:sp>
@@ -2491,7 +2488,7 @@
           <a:p>
             <a:pPr lvl="0"/>
             <a:r>
-              <a:rPr lang="en-US" smtClean="0"/>
+              <a:rPr lang="en-US"/>
               <a:t>Click to edit Master text styles</a:t>
             </a:r>
           </a:p>
@@ -2514,7 +2511,7 @@
           <a:p>
             <a:fld id="{5BCAD085-E8A6-8845-BD4E-CB4CCA059FC4}" type="datetimeFigureOut">
               <a:rPr lang="en-US" smtClean="0"/>
-              <a:t>1/27/13</a:t>
+              <a:t>7/1/2026</a:t>
             </a:fld>
             <a:endParaRPr lang="en-US"/>
           </a:p>
@@ -2623,10 +2620,9 @@
           <a:lstStyle/>
           <a:p>
             <a:r>
-              <a:rPr lang="en-US" smtClean="0"/>
+              <a:rPr lang="en-US"/>
               <a:t>Click to edit Master title style</a:t>
             </a:r>
-            <a:endParaRPr lang="en-US"/>
           </a:p>
         </p:txBody>
       </p:sp>
@@ -2657,38 +2653,37 @@
           <a:p>
             <a:pPr lvl="0"/>
             <a:r>
-              <a:rPr lang="en-US" smtClean="0"/>
+              <a:rPr lang="en-US"/>
               <a:t>Click to edit Master text styles</a:t>
             </a:r>
           </a:p>
           <a:p>
             <a:pPr lvl="1"/>
             <a:r>
-              <a:rPr lang="en-US" smtClean="0"/>
+              <a:rPr lang="en-US"/>
               <a:t>Second level</a:t>
             </a:r>
           </a:p>
           <a:p>
             <a:pPr lvl="2"/>
             <a:r>
-              <a:rPr lang="en-US" smtClean="0"/>
+              <a:rPr lang="en-US"/>
               <a:t>Third level</a:t>
             </a:r>
           </a:p>
           <a:p>
             <a:pPr lvl="3"/>
             <a:r>
-              <a:rPr lang="en-US" smtClean="0"/>
+              <a:rPr lang="en-US"/>
               <a:t>Fourth level</a:t>
             </a:r>
           </a:p>
           <a:p>
             <a:pPr lvl="4"/>
             <a:r>
-              <a:rPr lang="en-US" smtClean="0"/>
+              <a:rPr lang="en-US"/>
               <a:t>Fifth level</a:t>
             </a:r>
-            <a:endParaRPr lang="en-US"/>
           </a:p>
         </p:txBody>
       </p:sp>
@@ -2727,7 +2722,7 @@
           <a:p>
             <a:fld id="{5BCAD085-E8A6-8845-BD4E-CB4CCA059FC4}" type="datetimeFigureOut">
               <a:rPr lang="en-US" smtClean="0"/>
-              <a:t>1/27/13</a:t>
+              <a:t>7/1/2026</a:t>
             </a:fld>
             <a:endParaRPr lang="en-US"/>
           </a:p>
@@ -3086,7 +3081,7 @@
 </file>
 
 <file path=ppt/slides/slide1.xml><?xml version="1.0" encoding="utf-8"?>
-<p:sld xmlns:a="http://schemas.openxmlformats.org/drawingml/2006/main" xmlns:p="http://schemas.openxmlformats.org/presentationml/2006/main" xmlns:r="http://schemas.openxmlformats.org/officeDocument/2006/relationships">
+<p:sld xmlns:a="http://schemas.openxmlformats.org/drawingml/2006/main" xmlns:r="http://schemas.openxmlformats.org/officeDocument/2006/relationships" xmlns:p="http://schemas.openxmlformats.org/presentationml/2006/main">
   <p:cSld>
     <p:bg>
       <p:bgPr>
@@ -3102,7 +3097,14 @@
         <p:cNvGrpSpPr/>
         <p:nvPr/>
       </p:nvGrpSpPr>
-      <p:grpSpPr/>
+      <p:grpSpPr>
+        <a:xfrm>
+          <a:off x="0" y="0"/>
+          <a:ext cx="0" cy="0"/>
+          <a:chOff x="0" y="0"/>
+          <a:chExt cx="0" cy="0"/>
+        </a:xfrm>
+      </p:grpSpPr>
       <p:sp>
         <p:nvSpPr>
           <p:cNvPr id="2" name="Rectangle 1"/>
@@ -3144,6 +3146,7 @@
           <a:lstStyle/>
           <a:p>
             <a:pPr algn="ctr"/>
+            <a:endParaRPr/>
           </a:p>
         </p:txBody>
       </p:sp>
@@ -3188,6 +3191,7 @@
           <a:lstStyle/>
           <a:p>
             <a:pPr algn="ctr"/>
+            <a:endParaRPr/>
           </a:p>
         </p:txBody>
       </p:sp>
@@ -3232,6 +3236,7 @@
           <a:lstStyle/>
           <a:p>
             <a:pPr algn="ctr"/>
+            <a:endParaRPr/>
           </a:p>
         </p:txBody>
       </p:sp>
@@ -3295,7 +3300,7 @@
           <a:noFill/>
         </p:spPr>
         <p:txBody>
-          <a:bodyPr wrap="square" anchor="t" lIns="0" rIns="0" tIns="0" bIns="0">
+          <a:bodyPr wrap="square" lIns="0" tIns="0" rIns="0" bIns="0" anchor="t">
             <a:spAutoFit/>
           </a:bodyPr>
           <a:lstStyle/>
@@ -3340,7 +3345,7 @@
           <a:noFill/>
         </p:spPr>
         <p:txBody>
-          <a:bodyPr wrap="square" anchor="t" lIns="0" rIns="0" tIns="0" bIns="0">
+          <a:bodyPr wrap="square" lIns="0" tIns="0" rIns="0" bIns="0" anchor="t">
             <a:spAutoFit/>
           </a:bodyPr>
           <a:lstStyle/>
@@ -3385,7 +3390,7 @@
           <a:noFill/>
         </p:spPr>
         <p:txBody>
-          <a:bodyPr wrap="square" anchor="t" lIns="0" rIns="0" tIns="0" bIns="0">
+          <a:bodyPr wrap="square" lIns="0" tIns="0" rIns="0" bIns="0" anchor="t">
             <a:spAutoFit/>
           </a:bodyPr>
           <a:lstStyle/>
@@ -3430,7 +3435,7 @@
           <a:noFill/>
         </p:spPr>
         <p:txBody>
-          <a:bodyPr wrap="square" anchor="t" lIns="0" rIns="0" tIns="0" bIns="0">
+          <a:bodyPr wrap="square" lIns="0" tIns="0" rIns="0" bIns="0" anchor="t">
             <a:spAutoFit/>
           </a:bodyPr>
           <a:lstStyle/>
@@ -3453,7 +3458,7 @@
                 </a:solidFill>
                 <a:latin typeface="Cambria"/>
               </a:rPr>
-              <a:t>The tech disappears.</a:t>
+              <a:t>Technology made simple.</a:t>
             </a:r>
           </a:p>
           <a:p>
@@ -3475,7 +3480,7 @@
                 </a:solidFill>
                 <a:latin typeface="Cambria"/>
               </a:rPr>
-              <a:t>The results don't.</a:t>
+              <a:t>Growth made exponential.</a:t>
             </a:r>
           </a:p>
         </p:txBody>
@@ -3541,7 +3546,7 @@
 </file>
 
 <file path=ppt/slides/slide2.xml><?xml version="1.0" encoding="utf-8"?>
-<p:sld xmlns:a="http://schemas.openxmlformats.org/drawingml/2006/main" xmlns:p="http://schemas.openxmlformats.org/presentationml/2006/main" xmlns:r="http://schemas.openxmlformats.org/officeDocument/2006/relationships">
+<p:sld xmlns:a="http://schemas.openxmlformats.org/drawingml/2006/main" xmlns:r="http://schemas.openxmlformats.org/officeDocument/2006/relationships" xmlns:p="http://schemas.openxmlformats.org/presentationml/2006/main">
   <p:cSld>
     <p:bg>
       <p:bgPr>
@@ -3557,7 +3562,14 @@
         <p:cNvGrpSpPr/>
         <p:nvPr/>
       </p:nvGrpSpPr>
-      <p:grpSpPr/>
+      <p:grpSpPr>
+        <a:xfrm>
+          <a:off x="0" y="0"/>
+          <a:ext cx="0" cy="0"/>
+          <a:chOff x="0" y="0"/>
+          <a:chExt cx="0" cy="0"/>
+        </a:xfrm>
+      </p:grpSpPr>
       <p:sp>
         <p:nvSpPr>
           <p:cNvPr id="2" name="Rectangle 1"/>
@@ -3599,6 +3611,7 @@
           <a:lstStyle/>
           <a:p>
             <a:pPr algn="ctr"/>
+            <a:endParaRPr/>
           </a:p>
         </p:txBody>
       </p:sp>
@@ -3619,7 +3632,7 @@
           <a:noFill/>
         </p:spPr>
         <p:txBody>
-          <a:bodyPr wrap="square" anchor="t" lIns="0" rIns="0" tIns="0" bIns="0">
+          <a:bodyPr wrap="square" lIns="0" tIns="0" rIns="0" bIns="0" anchor="t">
             <a:spAutoFit/>
           </a:bodyPr>
           <a:lstStyle/>
@@ -3664,7 +3677,7 @@
           <a:noFill/>
         </p:spPr>
         <p:txBody>
-          <a:bodyPr wrap="square" anchor="t" lIns="0" rIns="0" tIns="0" bIns="0">
+          <a:bodyPr wrap="square" lIns="0" tIns="0" rIns="0" bIns="0" anchor="t">
             <a:spAutoFit/>
           </a:bodyPr>
           <a:lstStyle/>
@@ -3820,6 +3833,7 @@
           <a:lstStyle/>
           <a:p>
             <a:pPr algn="ctr"/>
+            <a:endParaRPr/>
           </a:p>
         </p:txBody>
       </p:sp>
@@ -3864,6 +3878,7 @@
           <a:lstStyle/>
           <a:p>
             <a:pPr algn="ctr"/>
+            <a:endParaRPr/>
           </a:p>
         </p:txBody>
       </p:sp>
@@ -3876,7 +3891,7 @@
         <p:spPr>
           <a:xfrm>
             <a:off x="1097280" y="2468880"/>
-            <a:ext cx="4480560" cy="1554480"/>
+            <a:ext cx="4480560" cy="740395"/>
           </a:xfrm>
           <a:prstGeom prst="rect">
             <a:avLst/>
@@ -3884,7 +3899,7 @@
           <a:noFill/>
         </p:spPr>
         <p:txBody>
-          <a:bodyPr wrap="square" anchor="t" lIns="0" rIns="0" tIns="0" bIns="0">
+          <a:bodyPr wrap="square" lIns="0" tIns="0" rIns="0" bIns="0" anchor="t">
             <a:spAutoFit/>
           </a:bodyPr>
           <a:lstStyle/>
@@ -3901,16 +3916,34 @@
               </a:spcAft>
             </a:pPr>
             <a:r>
-              <a:rPr sz="2200" b="1" i="0">
+              <a:rPr lang="en-US" sz="2200" b="1" dirty="0" err="1">
                 <a:solidFill>
                   <a:srgbClr val="FFFFFF"/>
                 </a:solidFill>
                 <a:latin typeface="Cambria"/>
               </a:rPr>
-              <a:t>lowtech  </a:t>
-            </a:r>
-            <a:r>
-              <a:rPr sz="1500" b="0" i="1">
+              <a:t>L</a:t>
+            </a:r>
+            <a:r>
+              <a:rPr sz="2200" b="1" i="0" dirty="0" err="1">
+                <a:solidFill>
+                  <a:srgbClr val="FFFFFF"/>
+                </a:solidFill>
+                <a:latin typeface="Cambria"/>
+              </a:rPr>
+              <a:t>owtech</a:t>
+            </a:r>
+            <a:r>
+              <a:rPr sz="2200" b="1" i="0" dirty="0">
+                <a:solidFill>
+                  <a:srgbClr val="FFFFFF"/>
+                </a:solidFill>
+                <a:latin typeface="Cambria"/>
+              </a:rPr>
+              <a:t>  </a:t>
+            </a:r>
+            <a:r>
+              <a:rPr sz="1500" b="0" i="1" dirty="0">
                 <a:solidFill>
                   <a:srgbClr val="B9CED6"/>
                 </a:solidFill>
@@ -3932,7 +3965,7 @@
               </a:spcAft>
             </a:pPr>
             <a:r>
-              <a:rPr sz="1700" b="1" i="1">
+              <a:rPr sz="1700" b="1" i="1" dirty="0">
                 <a:solidFill>
                   <a:srgbClr val="FFC220"/>
                 </a:solidFill>
@@ -3960,7 +3993,7 @@
           <a:noFill/>
         </p:spPr>
         <p:txBody>
-          <a:bodyPr wrap="square" anchor="t" lIns="0" rIns="0" tIns="0" bIns="0">
+          <a:bodyPr wrap="square" lIns="0" tIns="0" rIns="0" bIns="0" anchor="t">
             <a:spAutoFit/>
           </a:bodyPr>
           <a:lstStyle/>
@@ -3997,7 +4030,7 @@
         <p:spPr>
           <a:xfrm>
             <a:off x="6126480" y="2240280"/>
-            <a:ext cx="5212080" cy="3840480"/>
+            <a:ext cx="5212080" cy="2754793"/>
           </a:xfrm>
           <a:prstGeom prst="rect">
             <a:avLst/>
@@ -4005,7 +4038,7 @@
           <a:noFill/>
         </p:spPr>
         <p:txBody>
-          <a:bodyPr wrap="square" anchor="t" lIns="0" rIns="0" tIns="0" bIns="0">
+          <a:bodyPr wrap="square" lIns="0" tIns="0" rIns="0" bIns="0" anchor="t">
             <a:spAutoFit/>
           </a:bodyPr>
           <a:lstStyle/>
@@ -4022,13 +4055,31 @@
               </a:spcAft>
             </a:pPr>
             <a:r>
-              <a:rPr sz="1400" b="0" i="0">
+              <a:rPr sz="1400" b="0" i="0" dirty="0">
                 <a:solidFill>
                   <a:srgbClr val="2D4A5E"/>
                 </a:solidFill>
                 <a:latin typeface="Calibri"/>
               </a:rPr>
-              <a:t>Every other insurtech leads with how advanced its technology is — AI, machine learning, API-first. They make the technology the hero.</a:t>
+              <a:t>Every other </a:t>
+            </a:r>
+            <a:r>
+              <a:rPr sz="1400" b="0" i="0" dirty="0" err="1">
+                <a:solidFill>
+                  <a:srgbClr val="2D4A5E"/>
+                </a:solidFill>
+                <a:latin typeface="Calibri"/>
+              </a:rPr>
+              <a:t>insurtech</a:t>
+            </a:r>
+            <a:r>
+              <a:rPr sz="1400" b="0" i="0" dirty="0">
+                <a:solidFill>
+                  <a:srgbClr val="2D4A5E"/>
+                </a:solidFill>
+                <a:latin typeface="Calibri"/>
+              </a:rPr>
+              <a:t> leads with how advanced its technology is — AI, machine learning, API-first. They make the technology the hero.</a:t>
             </a:r>
           </a:p>
           <a:p>
@@ -4044,7 +4095,7 @@
               </a:spcAft>
             </a:pPr>
             <a:r>
-              <a:rPr sz="1500" b="1" i="0">
+              <a:rPr sz="1500" b="1" i="0" dirty="0">
                 <a:solidFill>
                   <a:srgbClr val="0B1C2C"/>
                 </a:solidFill>
@@ -4066,13 +4117,49 @@
               </a:spcAft>
             </a:pPr>
             <a:r>
-              <a:rPr sz="1400" b="0" i="0">
+              <a:rPr sz="1400" b="0" i="0" dirty="0">
                 <a:solidFill>
                   <a:srgbClr val="2D4A5E"/>
                 </a:solidFill>
                 <a:latin typeface="Calibri"/>
               </a:rPr>
-              <a:t>If using Lowtech feels low-tech to the people running the carrier, we did our job. Your operations team configures everything — no engineers, no release cycles, no IT tickets.</a:t>
+              <a:t>If using </a:t>
+            </a:r>
+            <a:r>
+              <a:rPr sz="1400" b="0" i="0" dirty="0" err="1">
+                <a:solidFill>
+                  <a:srgbClr val="2D4A5E"/>
+                </a:solidFill>
+                <a:latin typeface="Calibri"/>
+              </a:rPr>
+              <a:t>Lowtech</a:t>
+            </a:r>
+            <a:r>
+              <a:rPr sz="1400" b="0" i="0" dirty="0">
+                <a:solidFill>
+                  <a:srgbClr val="2D4A5E"/>
+                </a:solidFill>
+                <a:latin typeface="Calibri"/>
+              </a:rPr>
+              <a:t> feels low-tech to the people running the carrier, we did our job. Your </a:t>
+            </a:r>
+            <a:r>
+              <a:rPr lang="en-US" sz="1400" b="0" i="0" dirty="0">
+                <a:solidFill>
+                  <a:srgbClr val="2D4A5E"/>
+                </a:solidFill>
+                <a:latin typeface="Calibri"/>
+              </a:rPr>
+              <a:t>business</a:t>
+            </a:r>
+            <a:r>
+              <a:rPr sz="1400" b="0" i="0" dirty="0">
+                <a:solidFill>
+                  <a:srgbClr val="2D4A5E"/>
+                </a:solidFill>
+                <a:latin typeface="Calibri"/>
+              </a:rPr>
+              <a:t> team configures everything — no engineers, no release cycles, no IT tickets.</a:t>
             </a:r>
           </a:p>
           <a:p>
@@ -4088,7 +4175,7 @@
               </a:spcAft>
             </a:pPr>
             <a:r>
-              <a:rPr sz="1450" b="1" i="0">
+              <a:rPr sz="1450" b="1" i="0" dirty="0">
                 <a:solidFill>
                   <a:srgbClr val="0B1C2C"/>
                 </a:solidFill>
@@ -4110,7 +4197,7 @@
               </a:spcAft>
             </a:pPr>
             <a:r>
-              <a:rPr sz="1400" b="0" i="0">
+              <a:rPr sz="1400" b="0" i="0" dirty="0">
                 <a:solidFill>
                   <a:srgbClr val="2D4A5E"/>
                 </a:solidFill>
@@ -4130,7 +4217,7 @@
 </file>
 
 <file path=ppt/slides/slide3.xml><?xml version="1.0" encoding="utf-8"?>
-<p:sld xmlns:a="http://schemas.openxmlformats.org/drawingml/2006/main" xmlns:p="http://schemas.openxmlformats.org/presentationml/2006/main" xmlns:r="http://schemas.openxmlformats.org/officeDocument/2006/relationships">
+<p:sld xmlns:a="http://schemas.openxmlformats.org/drawingml/2006/main" xmlns:r="http://schemas.openxmlformats.org/officeDocument/2006/relationships" xmlns:p="http://schemas.openxmlformats.org/presentationml/2006/main">
   <p:cSld>
     <p:bg>
       <p:bgPr>
@@ -4146,7 +4233,14 @@
         <p:cNvGrpSpPr/>
         <p:nvPr/>
       </p:nvGrpSpPr>
-      <p:grpSpPr/>
+      <p:grpSpPr>
+        <a:xfrm>
+          <a:off x="0" y="0"/>
+          <a:ext cx="0" cy="0"/>
+          <a:chOff x="0" y="0"/>
+          <a:chExt cx="0" cy="0"/>
+        </a:xfrm>
+      </p:grpSpPr>
       <p:sp>
         <p:nvSpPr>
           <p:cNvPr id="2" name="Rectangle 1"/>
@@ -4188,6 +4282,7 @@
           <a:lstStyle/>
           <a:p>
             <a:pPr algn="ctr"/>
+            <a:endParaRPr/>
           </a:p>
         </p:txBody>
       </p:sp>
@@ -4208,7 +4303,7 @@
           <a:noFill/>
         </p:spPr>
         <p:txBody>
-          <a:bodyPr wrap="square" anchor="t" lIns="0" rIns="0" tIns="0" bIns="0">
+          <a:bodyPr wrap="square" lIns="0" tIns="0" rIns="0" bIns="0" anchor="t">
             <a:spAutoFit/>
           </a:bodyPr>
           <a:lstStyle/>
@@ -4253,7 +4348,7 @@
           <a:noFill/>
         </p:spPr>
         <p:txBody>
-          <a:bodyPr wrap="square" anchor="t" lIns="0" rIns="0" tIns="0" bIns="0">
+          <a:bodyPr wrap="square" lIns="0" tIns="0" rIns="0" bIns="0" anchor="t">
             <a:spAutoFit/>
           </a:bodyPr>
           <a:lstStyle/>
@@ -4409,6 +4504,7 @@
           <a:lstStyle/>
           <a:p>
             <a:pPr algn="ctr"/>
+            <a:endParaRPr/>
           </a:p>
         </p:txBody>
       </p:sp>
@@ -4453,6 +4549,7 @@
           <a:lstStyle/>
           <a:p>
             <a:pPr algn="ctr"/>
+            <a:endParaRPr/>
           </a:p>
         </p:txBody>
       </p:sp>
@@ -4473,7 +4570,7 @@
           <a:noFill/>
         </p:spPr>
         <p:txBody>
-          <a:bodyPr wrap="square" anchor="t" lIns="0" rIns="0" tIns="0" bIns="0">
+          <a:bodyPr wrap="square" lIns="0" tIns="0" rIns="0" bIns="0" anchor="t">
             <a:spAutoFit/>
           </a:bodyPr>
           <a:lstStyle/>
@@ -4564,6 +4661,7 @@
           <a:lstStyle/>
           <a:p>
             <a:pPr algn="ctr"/>
+            <a:endParaRPr/>
           </a:p>
         </p:txBody>
       </p:sp>
@@ -4608,6 +4706,7 @@
           <a:lstStyle/>
           <a:p>
             <a:pPr algn="ctr"/>
+            <a:endParaRPr/>
           </a:p>
         </p:txBody>
       </p:sp>
@@ -4628,7 +4727,7 @@
           <a:noFill/>
         </p:spPr>
         <p:txBody>
-          <a:bodyPr wrap="square" anchor="t" lIns="0" rIns="0" tIns="0" bIns="0">
+          <a:bodyPr wrap="square" lIns="0" tIns="0" rIns="0" bIns="0" anchor="t">
             <a:spAutoFit/>
           </a:bodyPr>
           <a:lstStyle/>
@@ -4719,6 +4818,7 @@
           <a:lstStyle/>
           <a:p>
             <a:pPr algn="ctr"/>
+            <a:endParaRPr/>
           </a:p>
         </p:txBody>
       </p:sp>
@@ -4763,6 +4863,7 @@
           <a:lstStyle/>
           <a:p>
             <a:pPr algn="ctr"/>
+            <a:endParaRPr/>
           </a:p>
         </p:txBody>
       </p:sp>
@@ -4783,7 +4884,7 @@
           <a:noFill/>
         </p:spPr>
         <p:txBody>
-          <a:bodyPr wrap="square" anchor="t" lIns="0" rIns="0" tIns="0" bIns="0">
+          <a:bodyPr wrap="square" lIns="0" tIns="0" rIns="0" bIns="0" anchor="t">
             <a:spAutoFit/>
           </a:bodyPr>
           <a:lstStyle/>
@@ -4874,6 +4975,7 @@
           <a:lstStyle/>
           <a:p>
             <a:pPr algn="ctr"/>
+            <a:endParaRPr/>
           </a:p>
         </p:txBody>
       </p:sp>
@@ -4918,6 +5020,7 @@
           <a:lstStyle/>
           <a:p>
             <a:pPr algn="ctr"/>
+            <a:endParaRPr/>
           </a:p>
         </p:txBody>
       </p:sp>
@@ -4938,7 +5041,7 @@
           <a:noFill/>
         </p:spPr>
         <p:txBody>
-          <a:bodyPr wrap="square" anchor="t" lIns="0" rIns="0" tIns="0" bIns="0">
+          <a:bodyPr wrap="square" lIns="0" tIns="0" rIns="0" bIns="0" anchor="t">
             <a:spAutoFit/>
           </a:bodyPr>
           <a:lstStyle/>
@@ -5029,6 +5132,7 @@
           <a:lstStyle/>
           <a:p>
             <a:pPr algn="ctr"/>
+            <a:endParaRPr/>
           </a:p>
         </p:txBody>
       </p:sp>
@@ -5073,6 +5177,7 @@
           <a:lstStyle/>
           <a:p>
             <a:pPr algn="ctr"/>
+            <a:endParaRPr/>
           </a:p>
         </p:txBody>
       </p:sp>
@@ -5093,7 +5198,7 @@
           <a:noFill/>
         </p:spPr>
         <p:txBody>
-          <a:bodyPr wrap="square" anchor="ctr" lIns="0" rIns="0" tIns="0" bIns="0">
+          <a:bodyPr wrap="square" lIns="0" tIns="0" rIns="0" bIns="0" anchor="ctr">
             <a:spAutoFit/>
           </a:bodyPr>
           <a:lstStyle/>
@@ -5130,7 +5235,7 @@
 </file>
 
 <file path=ppt/slides/slide4.xml><?xml version="1.0" encoding="utf-8"?>
-<p:sld xmlns:a="http://schemas.openxmlformats.org/drawingml/2006/main" xmlns:p="http://schemas.openxmlformats.org/presentationml/2006/main" xmlns:r="http://schemas.openxmlformats.org/officeDocument/2006/relationships">
+<p:sld xmlns:a="http://schemas.openxmlformats.org/drawingml/2006/main" xmlns:r="http://schemas.openxmlformats.org/officeDocument/2006/relationships" xmlns:p="http://schemas.openxmlformats.org/presentationml/2006/main">
   <p:cSld>
     <p:bg>
       <p:bgPr>
@@ -5146,7 +5251,14 @@
         <p:cNvGrpSpPr/>
         <p:nvPr/>
       </p:nvGrpSpPr>
-      <p:grpSpPr/>
+      <p:grpSpPr>
+        <a:xfrm>
+          <a:off x="0" y="0"/>
+          <a:ext cx="0" cy="0"/>
+          <a:chOff x="0" y="0"/>
+          <a:chExt cx="0" cy="0"/>
+        </a:xfrm>
+      </p:grpSpPr>
       <p:sp>
         <p:nvSpPr>
           <p:cNvPr id="2" name="Rectangle 1"/>
@@ -5188,6 +5300,7 @@
           <a:lstStyle/>
           <a:p>
             <a:pPr algn="ctr"/>
+            <a:endParaRPr/>
           </a:p>
         </p:txBody>
       </p:sp>
@@ -5208,7 +5321,7 @@
           <a:noFill/>
         </p:spPr>
         <p:txBody>
-          <a:bodyPr wrap="square" anchor="t" lIns="0" rIns="0" tIns="0" bIns="0">
+          <a:bodyPr wrap="square" lIns="0" tIns="0" rIns="0" bIns="0" anchor="t">
             <a:spAutoFit/>
           </a:bodyPr>
           <a:lstStyle/>
@@ -5253,7 +5366,7 @@
           <a:noFill/>
         </p:spPr>
         <p:txBody>
-          <a:bodyPr wrap="square" anchor="t" lIns="0" rIns="0" tIns="0" bIns="0">
+          <a:bodyPr wrap="square" lIns="0" tIns="0" rIns="0" bIns="0" anchor="t">
             <a:spAutoFit/>
           </a:bodyPr>
           <a:lstStyle/>
@@ -5409,6 +5522,7 @@
           <a:lstStyle/>
           <a:p>
             <a:pPr algn="ctr"/>
+            <a:endParaRPr/>
           </a:p>
         </p:txBody>
       </p:sp>
@@ -5453,6 +5567,7 @@
           <a:lstStyle/>
           <a:p>
             <a:pPr algn="ctr"/>
+            <a:endParaRPr/>
           </a:p>
         </p:txBody>
       </p:sp>
@@ -5465,7 +5580,7 @@
         <p:spPr>
           <a:xfrm>
             <a:off x="1078992" y="2395728"/>
-            <a:ext cx="2788920" cy="2834640"/>
+            <a:ext cx="2788920" cy="1702582"/>
           </a:xfrm>
           <a:prstGeom prst="rect">
             <a:avLst/>
@@ -5473,7 +5588,7 @@
           <a:noFill/>
         </p:spPr>
         <p:txBody>
-          <a:bodyPr wrap="square" anchor="t" lIns="0" rIns="0" tIns="0" bIns="0">
+          <a:bodyPr wrap="square" lIns="0" tIns="0" rIns="0" bIns="0" anchor="t">
             <a:spAutoFit/>
           </a:bodyPr>
           <a:lstStyle/>
@@ -5490,7 +5605,7 @@
               </a:spcAft>
             </a:pPr>
             <a:r>
-              <a:rPr sz="1800" b="1" i="0">
+              <a:rPr sz="1800" b="1" i="0" dirty="0">
                 <a:solidFill>
                   <a:srgbClr val="0B1C2C"/>
                 </a:solidFill>
@@ -5512,7 +5627,7 @@
               </a:spcAft>
             </a:pPr>
             <a:r>
-              <a:rPr sz="1100" b="1" i="0">
+              <a:rPr sz="1100" b="1" i="0" dirty="0">
                 <a:solidFill>
                   <a:srgbClr val="0B7A8C"/>
                 </a:solidFill>
@@ -5534,13 +5649,31 @@
               </a:spcAft>
             </a:pPr>
             <a:r>
-              <a:rPr sz="1200" b="0" i="0">
+              <a:rPr sz="1200" b="0" i="0" dirty="0">
                 <a:solidFill>
                   <a:srgbClr val="5A6B78"/>
                 </a:solidFill>
                 <a:latin typeface="Calibri"/>
               </a:rPr>
-              <a:t>The configurability engine. Your operations team configures products, underwriting rules, screens, questions, and API calls through a drag-and-drop studio. No code. Sandbox to production in minutes.</a:t>
+              <a:t>The configurability engine. Your </a:t>
+            </a:r>
+            <a:r>
+              <a:rPr lang="en-US" sz="1200" b="0" i="0" dirty="0">
+                <a:solidFill>
+                  <a:srgbClr val="5A6B78"/>
+                </a:solidFill>
+                <a:latin typeface="Calibri"/>
+              </a:rPr>
+              <a:t>business</a:t>
+            </a:r>
+            <a:r>
+              <a:rPr sz="1200" b="0" i="0" dirty="0">
+                <a:solidFill>
+                  <a:srgbClr val="5A6B78"/>
+                </a:solidFill>
+                <a:latin typeface="Calibri"/>
+              </a:rPr>
+              <a:t> team configures products, underwriting rules, screens, questions, and API calls through a drag-and-drop studio. No code. Sandbox to production in minutes.</a:t>
             </a:r>
           </a:p>
         </p:txBody>
@@ -5586,6 +5719,7 @@
           <a:lstStyle/>
           <a:p>
             <a:pPr algn="ctr"/>
+            <a:endParaRPr/>
           </a:p>
         </p:txBody>
       </p:sp>
@@ -5630,6 +5764,7 @@
           <a:lstStyle/>
           <a:p>
             <a:pPr algn="ctr"/>
+            <a:endParaRPr/>
           </a:p>
         </p:txBody>
       </p:sp>
@@ -5650,7 +5785,7 @@
           <a:noFill/>
         </p:spPr>
         <p:txBody>
-          <a:bodyPr wrap="square" anchor="t" lIns="0" rIns="0" tIns="0" bIns="0">
+          <a:bodyPr wrap="square" lIns="0" tIns="0" rIns="0" bIns="0" anchor="t">
             <a:spAutoFit/>
           </a:bodyPr>
           <a:lstStyle/>
@@ -5763,6 +5898,7 @@
           <a:lstStyle/>
           <a:p>
             <a:pPr algn="ctr"/>
+            <a:endParaRPr/>
           </a:p>
         </p:txBody>
       </p:sp>
@@ -5807,6 +5943,7 @@
           <a:lstStyle/>
           <a:p>
             <a:pPr algn="ctr"/>
+            <a:endParaRPr/>
           </a:p>
         </p:txBody>
       </p:sp>
@@ -5827,7 +5964,7 @@
           <a:noFill/>
         </p:spPr>
         <p:txBody>
-          <a:bodyPr wrap="square" anchor="t" lIns="0" rIns="0" tIns="0" bIns="0">
+          <a:bodyPr wrap="square" lIns="0" tIns="0" rIns="0" bIns="0" anchor="t">
             <a:spAutoFit/>
           </a:bodyPr>
           <a:lstStyle/>
@@ -5940,6 +6077,7 @@
           <a:lstStyle/>
           <a:p>
             <a:pPr algn="ctr"/>
+            <a:endParaRPr/>
           </a:p>
         </p:txBody>
       </p:sp>
@@ -5984,6 +6122,7 @@
           <a:lstStyle/>
           <a:p>
             <a:pPr algn="ctr"/>
+            <a:endParaRPr/>
           </a:p>
         </p:txBody>
       </p:sp>
@@ -6004,7 +6143,7 @@
           <a:noFill/>
         </p:spPr>
         <p:txBody>
-          <a:bodyPr wrap="square" anchor="ctr" lIns="0" rIns="0" tIns="0" bIns="0">
+          <a:bodyPr wrap="square" lIns="0" tIns="0" rIns="0" bIns="0" anchor="ctr">
             <a:spAutoFit/>
           </a:bodyPr>
           <a:lstStyle/>
@@ -6041,7 +6180,7 @@
 </file>
 
 <file path=ppt/slides/slide5.xml><?xml version="1.0" encoding="utf-8"?>
-<p:sld xmlns:a="http://schemas.openxmlformats.org/drawingml/2006/main" xmlns:p="http://schemas.openxmlformats.org/presentationml/2006/main" xmlns:r="http://schemas.openxmlformats.org/officeDocument/2006/relationships">
+<p:sld xmlns:a="http://schemas.openxmlformats.org/drawingml/2006/main" xmlns:r="http://schemas.openxmlformats.org/officeDocument/2006/relationships" xmlns:p="http://schemas.openxmlformats.org/presentationml/2006/main">
   <p:cSld>
     <p:bg>
       <p:bgPr>
@@ -6057,7 +6196,14 @@
         <p:cNvGrpSpPr/>
         <p:nvPr/>
       </p:nvGrpSpPr>
-      <p:grpSpPr/>
+      <p:grpSpPr>
+        <a:xfrm>
+          <a:off x="0" y="0"/>
+          <a:ext cx="0" cy="0"/>
+          <a:chOff x="0" y="0"/>
+          <a:chExt cx="0" cy="0"/>
+        </a:xfrm>
+      </p:grpSpPr>
       <p:sp>
         <p:nvSpPr>
           <p:cNvPr id="2" name="Rectangle 1"/>
@@ -6099,6 +6245,7 @@
           <a:lstStyle/>
           <a:p>
             <a:pPr algn="ctr"/>
+            <a:endParaRPr/>
           </a:p>
         </p:txBody>
       </p:sp>
@@ -6119,7 +6266,7 @@
           <a:noFill/>
         </p:spPr>
         <p:txBody>
-          <a:bodyPr wrap="square" anchor="t" lIns="0" rIns="0" tIns="0" bIns="0">
+          <a:bodyPr wrap="square" lIns="0" tIns="0" rIns="0" bIns="0" anchor="t">
             <a:spAutoFit/>
           </a:bodyPr>
           <a:lstStyle/>
@@ -6164,7 +6311,7 @@
           <a:noFill/>
         </p:spPr>
         <p:txBody>
-          <a:bodyPr wrap="square" anchor="t" lIns="0" rIns="0" tIns="0" bIns="0">
+          <a:bodyPr wrap="square" lIns="0" tIns="0" rIns="0" bIns="0" anchor="t">
             <a:spAutoFit/>
           </a:bodyPr>
           <a:lstStyle/>
@@ -6320,6 +6467,7 @@
           <a:lstStyle/>
           <a:p>
             <a:pPr algn="ctr"/>
+            <a:endParaRPr/>
           </a:p>
         </p:txBody>
       </p:sp>
@@ -6364,6 +6512,7 @@
           <a:lstStyle/>
           <a:p>
             <a:pPr algn="ctr"/>
+            <a:endParaRPr/>
           </a:p>
         </p:txBody>
       </p:sp>
@@ -6384,7 +6533,7 @@
           <a:noFill/>
         </p:spPr>
         <p:txBody>
-          <a:bodyPr wrap="square" anchor="t" lIns="0" rIns="0" tIns="0" bIns="0">
+          <a:bodyPr wrap="square" lIns="0" tIns="0" rIns="0" bIns="0" anchor="t">
             <a:spAutoFit/>
           </a:bodyPr>
           <a:lstStyle/>
@@ -6451,7 +6600,7 @@
                 </a:solidFill>
                 <a:latin typeface="Calibri"/>
               </a:rPr>
-              <a:t>The configurability engine. Products, rules, screens, and API calls — configured by your operations team. Drag, drop, done.</a:t>
+              <a:t>The configurability engine. Products, rules, screens, and API calls — configured by your business team. Drag, drop, done.</a:t>
             </a:r>
           </a:p>
         </p:txBody>
@@ -6497,6 +6646,7 @@
           <a:lstStyle/>
           <a:p>
             <a:pPr algn="ctr"/>
+            <a:endParaRPr/>
           </a:p>
         </p:txBody>
       </p:sp>
@@ -6541,6 +6691,7 @@
           <a:lstStyle/>
           <a:p>
             <a:pPr algn="ctr"/>
+            <a:endParaRPr/>
           </a:p>
         </p:txBody>
       </p:sp>
@@ -6561,7 +6712,7 @@
           <a:noFill/>
         </p:spPr>
         <p:txBody>
-          <a:bodyPr wrap="square" anchor="t" lIns="0" rIns="0" tIns="0" bIns="0">
+          <a:bodyPr wrap="square" lIns="0" tIns="0" rIns="0" bIns="0" anchor="t">
             <a:spAutoFit/>
           </a:bodyPr>
           <a:lstStyle/>
@@ -6674,6 +6825,7 @@
           <a:lstStyle/>
           <a:p>
             <a:pPr algn="ctr"/>
+            <a:endParaRPr/>
           </a:p>
         </p:txBody>
       </p:sp>
@@ -6718,6 +6870,7 @@
           <a:lstStyle/>
           <a:p>
             <a:pPr algn="ctr"/>
+            <a:endParaRPr/>
           </a:p>
         </p:txBody>
       </p:sp>
@@ -6738,7 +6891,7 @@
           <a:noFill/>
         </p:spPr>
         <p:txBody>
-          <a:bodyPr wrap="square" anchor="t" lIns="0" rIns="0" tIns="0" bIns="0">
+          <a:bodyPr wrap="square" lIns="0" tIns="0" rIns="0" bIns="0" anchor="t">
             <a:spAutoFit/>
           </a:bodyPr>
           <a:lstStyle/>
@@ -6851,6 +7004,7 @@
           <a:lstStyle/>
           <a:p>
             <a:pPr algn="ctr"/>
+            <a:endParaRPr/>
           </a:p>
         </p:txBody>
       </p:sp>
@@ -6895,6 +7049,7 @@
           <a:lstStyle/>
           <a:p>
             <a:pPr algn="ctr"/>
+            <a:endParaRPr/>
           </a:p>
         </p:txBody>
       </p:sp>
@@ -6915,7 +7070,7 @@
           <a:noFill/>
         </p:spPr>
         <p:txBody>
-          <a:bodyPr wrap="square" anchor="t" lIns="0" rIns="0" tIns="0" bIns="0">
+          <a:bodyPr wrap="square" lIns="0" tIns="0" rIns="0" bIns="0" anchor="t">
             <a:spAutoFit/>
           </a:bodyPr>
           <a:lstStyle/>
@@ -7028,6 +7183,7 @@
           <a:lstStyle/>
           <a:p>
             <a:pPr algn="ctr"/>
+            <a:endParaRPr/>
           </a:p>
         </p:txBody>
       </p:sp>
@@ -7072,6 +7228,7 @@
           <a:lstStyle/>
           <a:p>
             <a:pPr algn="ctr"/>
+            <a:endParaRPr/>
           </a:p>
         </p:txBody>
       </p:sp>
@@ -7092,7 +7249,7 @@
           <a:noFill/>
         </p:spPr>
         <p:txBody>
-          <a:bodyPr wrap="square" anchor="t" lIns="0" rIns="0" tIns="0" bIns="0">
+          <a:bodyPr wrap="square" lIns="0" tIns="0" rIns="0" bIns="0" anchor="t">
             <a:spAutoFit/>
           </a:bodyPr>
           <a:lstStyle/>
@@ -7181,7 +7338,7 @@
           <a:noFill/>
         </p:spPr>
         <p:txBody>
-          <a:bodyPr wrap="square" anchor="t" lIns="0" rIns="0" tIns="0" bIns="0">
+          <a:bodyPr wrap="square" lIns="0" tIns="0" rIns="0" bIns="0" anchor="t">
             <a:spAutoFit/>
           </a:bodyPr>
           <a:lstStyle/>
@@ -7218,7 +7375,7 @@
 </file>
 
 <file path=ppt/slides/slide6.xml><?xml version="1.0" encoding="utf-8"?>
-<p:sld xmlns:a="http://schemas.openxmlformats.org/drawingml/2006/main" xmlns:p="http://schemas.openxmlformats.org/presentationml/2006/main" xmlns:r="http://schemas.openxmlformats.org/officeDocument/2006/relationships">
+<p:sld xmlns:a="http://schemas.openxmlformats.org/drawingml/2006/main" xmlns:r="http://schemas.openxmlformats.org/officeDocument/2006/relationships" xmlns:p="http://schemas.openxmlformats.org/presentationml/2006/main">
   <p:cSld>
     <p:bg>
       <p:bgPr>
@@ -7234,7 +7391,14 @@
         <p:cNvGrpSpPr/>
         <p:nvPr/>
       </p:nvGrpSpPr>
-      <p:grpSpPr/>
+      <p:grpSpPr>
+        <a:xfrm>
+          <a:off x="0" y="0"/>
+          <a:ext cx="0" cy="0"/>
+          <a:chOff x="0" y="0"/>
+          <a:chExt cx="0" cy="0"/>
+        </a:xfrm>
+      </p:grpSpPr>
       <p:sp>
         <p:nvSpPr>
           <p:cNvPr id="2" name="Rectangle 1"/>
@@ -7276,6 +7440,7 @@
           <a:lstStyle/>
           <a:p>
             <a:pPr algn="ctr"/>
+            <a:endParaRPr/>
           </a:p>
         </p:txBody>
       </p:sp>
@@ -7296,7 +7461,7 @@
           <a:noFill/>
         </p:spPr>
         <p:txBody>
-          <a:bodyPr wrap="square" anchor="t" lIns="0" rIns="0" tIns="0" bIns="0">
+          <a:bodyPr wrap="square" lIns="0" tIns="0" rIns="0" bIns="0" anchor="t">
             <a:spAutoFit/>
           </a:bodyPr>
           <a:lstStyle/>
@@ -7341,7 +7506,7 @@
           <a:noFill/>
         </p:spPr>
         <p:txBody>
-          <a:bodyPr wrap="square" anchor="t" lIns="0" rIns="0" tIns="0" bIns="0">
+          <a:bodyPr wrap="square" lIns="0" tIns="0" rIns="0" bIns="0" anchor="t">
             <a:spAutoFit/>
           </a:bodyPr>
           <a:lstStyle/>
@@ -7497,6 +7662,7 @@
           <a:lstStyle/>
           <a:p>
             <a:pPr algn="ctr"/>
+            <a:endParaRPr/>
           </a:p>
         </p:txBody>
       </p:sp>
@@ -7541,6 +7707,7 @@
           <a:lstStyle/>
           <a:p>
             <a:pPr algn="ctr"/>
+            <a:endParaRPr/>
           </a:p>
         </p:txBody>
       </p:sp>
@@ -7561,7 +7728,7 @@
           <a:noFill/>
         </p:spPr>
         <p:txBody>
-          <a:bodyPr wrap="square" anchor="t" lIns="0" rIns="0" tIns="0" bIns="0">
+          <a:bodyPr wrap="square" lIns="0" tIns="0" rIns="0" bIns="0" anchor="t">
             <a:spAutoFit/>
           </a:bodyPr>
           <a:lstStyle/>
@@ -7652,6 +7819,7 @@
           <a:lstStyle/>
           <a:p>
             <a:pPr algn="ctr"/>
+            <a:endParaRPr/>
           </a:p>
         </p:txBody>
       </p:sp>
@@ -7696,6 +7864,7 @@
           <a:lstStyle/>
           <a:p>
             <a:pPr algn="ctr"/>
+            <a:endParaRPr/>
           </a:p>
         </p:txBody>
       </p:sp>
@@ -7716,7 +7885,7 @@
           <a:noFill/>
         </p:spPr>
         <p:txBody>
-          <a:bodyPr wrap="square" anchor="t" lIns="0" rIns="0" tIns="0" bIns="0">
+          <a:bodyPr wrap="square" lIns="0" tIns="0" rIns="0" bIns="0" anchor="t">
             <a:spAutoFit/>
           </a:bodyPr>
           <a:lstStyle/>
@@ -7807,6 +7976,7 @@
           <a:lstStyle/>
           <a:p>
             <a:pPr algn="ctr"/>
+            <a:endParaRPr/>
           </a:p>
         </p:txBody>
       </p:sp>
@@ -7851,6 +8021,7 @@
           <a:lstStyle/>
           <a:p>
             <a:pPr algn="ctr"/>
+            <a:endParaRPr/>
           </a:p>
         </p:txBody>
       </p:sp>
@@ -7871,7 +8042,7 @@
           <a:noFill/>
         </p:spPr>
         <p:txBody>
-          <a:bodyPr wrap="square" anchor="t" lIns="0" rIns="0" tIns="0" bIns="0">
+          <a:bodyPr wrap="square" lIns="0" tIns="0" rIns="0" bIns="0" anchor="t">
             <a:spAutoFit/>
           </a:bodyPr>
           <a:lstStyle/>
@@ -7962,6 +8133,7 @@
           <a:lstStyle/>
           <a:p>
             <a:pPr algn="ctr"/>
+            <a:endParaRPr/>
           </a:p>
         </p:txBody>
       </p:sp>
@@ -8006,6 +8178,7 @@
           <a:lstStyle/>
           <a:p>
             <a:pPr algn="ctr"/>
+            <a:endParaRPr/>
           </a:p>
         </p:txBody>
       </p:sp>
@@ -8026,7 +8199,7 @@
           <a:noFill/>
         </p:spPr>
         <p:txBody>
-          <a:bodyPr wrap="square" anchor="t" lIns="0" rIns="0" tIns="0" bIns="0">
+          <a:bodyPr wrap="square" lIns="0" tIns="0" rIns="0" bIns="0" anchor="t">
             <a:spAutoFit/>
           </a:bodyPr>
           <a:lstStyle/>
@@ -8117,6 +8290,7 @@
           <a:lstStyle/>
           <a:p>
             <a:pPr algn="ctr"/>
+            <a:endParaRPr/>
           </a:p>
         </p:txBody>
       </p:sp>
@@ -8161,6 +8335,7 @@
           <a:lstStyle/>
           <a:p>
             <a:pPr algn="ctr"/>
+            <a:endParaRPr/>
           </a:p>
         </p:txBody>
       </p:sp>
@@ -8181,7 +8356,7 @@
           <a:noFill/>
         </p:spPr>
         <p:txBody>
-          <a:bodyPr wrap="square" anchor="t" lIns="0" rIns="0" tIns="0" bIns="0">
+          <a:bodyPr wrap="square" lIns="0" tIns="0" rIns="0" bIns="0" anchor="t">
             <a:spAutoFit/>
           </a:bodyPr>
           <a:lstStyle/>
@@ -8272,6 +8447,7 @@
           <a:lstStyle/>
           <a:p>
             <a:pPr algn="ctr"/>
+            <a:endParaRPr/>
           </a:p>
         </p:txBody>
       </p:sp>
@@ -8316,6 +8492,7 @@
           <a:lstStyle/>
           <a:p>
             <a:pPr algn="ctr"/>
+            <a:endParaRPr/>
           </a:p>
         </p:txBody>
       </p:sp>
@@ -8336,7 +8513,7 @@
           <a:noFill/>
         </p:spPr>
         <p:txBody>
-          <a:bodyPr wrap="square" anchor="t" lIns="0" rIns="0" tIns="0" bIns="0">
+          <a:bodyPr wrap="square" lIns="0" tIns="0" rIns="0" bIns="0" anchor="t">
             <a:spAutoFit/>
           </a:bodyPr>
           <a:lstStyle/>
@@ -8395,7 +8572,7 @@
 </file>
 
 <file path=ppt/slides/slide7.xml><?xml version="1.0" encoding="utf-8"?>
-<p:sld xmlns:a="http://schemas.openxmlformats.org/drawingml/2006/main" xmlns:p="http://schemas.openxmlformats.org/presentationml/2006/main" xmlns:r="http://schemas.openxmlformats.org/officeDocument/2006/relationships">
+<p:sld xmlns:a="http://schemas.openxmlformats.org/drawingml/2006/main" xmlns:r="http://schemas.openxmlformats.org/officeDocument/2006/relationships" xmlns:p="http://schemas.openxmlformats.org/presentationml/2006/main">
   <p:cSld>
     <p:bg>
       <p:bgPr>
@@ -8411,7 +8588,14 @@
         <p:cNvGrpSpPr/>
         <p:nvPr/>
       </p:nvGrpSpPr>
-      <p:grpSpPr/>
+      <p:grpSpPr>
+        <a:xfrm>
+          <a:off x="0" y="0"/>
+          <a:ext cx="0" cy="0"/>
+          <a:chOff x="0" y="0"/>
+          <a:chExt cx="0" cy="0"/>
+        </a:xfrm>
+      </p:grpSpPr>
       <p:sp>
         <p:nvSpPr>
           <p:cNvPr id="2" name="Rectangle 1"/>
@@ -8453,6 +8637,7 @@
           <a:lstStyle/>
           <a:p>
             <a:pPr algn="ctr"/>
+            <a:endParaRPr/>
           </a:p>
         </p:txBody>
       </p:sp>
@@ -8473,7 +8658,7 @@
           <a:noFill/>
         </p:spPr>
         <p:txBody>
-          <a:bodyPr wrap="square" anchor="t" lIns="0" rIns="0" tIns="0" bIns="0">
+          <a:bodyPr wrap="square" lIns="0" tIns="0" rIns="0" bIns="0" anchor="t">
             <a:spAutoFit/>
           </a:bodyPr>
           <a:lstStyle/>
@@ -8518,7 +8703,7 @@
           <a:noFill/>
         </p:spPr>
         <p:txBody>
-          <a:bodyPr wrap="square" anchor="t" lIns="0" rIns="0" tIns="0" bIns="0">
+          <a:bodyPr wrap="square" lIns="0" tIns="0" rIns="0" bIns="0" anchor="t">
             <a:spAutoFit/>
           </a:bodyPr>
           <a:lstStyle/>
@@ -8674,6 +8859,7 @@
           <a:lstStyle/>
           <a:p>
             <a:pPr algn="ctr"/>
+            <a:endParaRPr/>
           </a:p>
         </p:txBody>
       </p:sp>
@@ -8718,6 +8904,7 @@
           <a:lstStyle/>
           <a:p>
             <a:pPr algn="ctr"/>
+            <a:endParaRPr/>
           </a:p>
         </p:txBody>
       </p:sp>
@@ -8730,7 +8917,7 @@
         <p:spPr>
           <a:xfrm>
             <a:off x="1143000" y="2743200"/>
-            <a:ext cx="4206240" cy="2926080"/>
+            <a:ext cx="4206240" cy="1116972"/>
           </a:xfrm>
           <a:prstGeom prst="rect">
             <a:avLst/>
@@ -8738,7 +8925,7 @@
           <a:noFill/>
         </p:spPr>
         <p:txBody>
-          <a:bodyPr wrap="square" anchor="t" lIns="0" rIns="0" tIns="0" bIns="0">
+          <a:bodyPr wrap="square" lIns="0" tIns="0" rIns="0" bIns="0" anchor="t">
             <a:spAutoFit/>
           </a:bodyPr>
           <a:lstStyle/>
@@ -8755,9 +8942,9 @@
               </a:spcAft>
             </a:pPr>
             <a:r>
-              <a:rPr sz="1100" b="1" i="0">
-                <a:solidFill>
-                  <a:srgbClr val="FFC220"/>
+              <a:rPr sz="1100" b="1" i="0" dirty="0">
+                <a:solidFill>
+                  <a:schemeClr val="bg1"/>
                 </a:solidFill>
                 <a:latin typeface="Calibri"/>
               </a:rPr>
@@ -8777,35 +8964,22 @@
               </a:spcAft>
             </a:pPr>
             <a:r>
-              <a:rPr sz="2600" b="1" i="0">
-                <a:solidFill>
-                  <a:srgbClr val="FFFFFF"/>
+              <a:rPr lang="en-US" sz="2600" b="1" i="0" dirty="0">
+                <a:solidFill>
+                  <a:srgbClr val="FFC220"/>
                 </a:solidFill>
                 <a:latin typeface="Cambria"/>
               </a:rPr>
-              <a:t>The tech disappears.</a:t>
-            </a:r>
-          </a:p>
-          <a:p>
-            <a:pPr algn="l">
-              <a:lnSpc>
-                <a:spcPct val="105000"/>
-              </a:lnSpc>
-              <a:spcBef>
-                <a:spcPts val="0"/>
-              </a:spcBef>
-              <a:spcAft>
-                <a:spcPts val="1000"/>
-              </a:spcAft>
-            </a:pPr>
-            <a:r>
-              <a:rPr sz="2600" b="1" i="0">
+              <a:t>So simple it feels like cheating</a:t>
+            </a:r>
+            <a:r>
+              <a:rPr sz="2600" b="1" i="0" dirty="0">
                 <a:solidFill>
                   <a:srgbClr val="FFC220"/>
                 </a:solidFill>
                 <a:latin typeface="Cambria"/>
               </a:rPr>
-              <a:t>The results don't.</a:t>
+              <a:t>.</a:t>
             </a:r>
           </a:p>
         </p:txBody>
@@ -8819,7 +8993,7 @@
         <p:spPr>
           <a:xfrm>
             <a:off x="6035040" y="2286000"/>
-            <a:ext cx="5303520" cy="777240"/>
+            <a:ext cx="5303520" cy="433452"/>
           </a:xfrm>
           <a:prstGeom prst="rect">
             <a:avLst/>
@@ -8827,7 +9001,7 @@
           <a:noFill/>
         </p:spPr>
         <p:txBody>
-          <a:bodyPr wrap="square" anchor="t" lIns="0" rIns="0" tIns="0" bIns="0">
+          <a:bodyPr wrap="square" lIns="0" tIns="0" rIns="0" bIns="0" anchor="t">
             <a:spAutoFit/>
           </a:bodyPr>
           <a:lstStyle/>
@@ -8844,7 +9018,7 @@
               </a:spcAft>
             </a:pPr>
             <a:r>
-              <a:rPr sz="1050" b="1" i="0">
+              <a:rPr sz="1050" b="1" i="0" dirty="0">
                 <a:solidFill>
                   <a:srgbClr val="0B7A8C"/>
                 </a:solidFill>
@@ -8866,13 +9040,49 @@
               </a:spcAft>
             </a:pPr>
             <a:r>
-              <a:rPr sz="1600" b="1" i="0">
+              <a:rPr sz="1600" b="1" i="0" dirty="0">
                 <a:solidFill>
                   <a:srgbClr val="0B1C2C"/>
                 </a:solidFill>
                 <a:latin typeface="Cambria"/>
               </a:rPr>
-              <a:t>Built by engineers. Felt like magic by everyone else.</a:t>
+              <a:t>Built by engineers. Fe</a:t>
+            </a:r>
+            <a:r>
+              <a:rPr lang="en-US" sz="1600" b="1" i="0" dirty="0">
+                <a:solidFill>
+                  <a:srgbClr val="0B1C2C"/>
+                </a:solidFill>
+                <a:latin typeface="Cambria"/>
+              </a:rPr>
+              <a:t>els</a:t>
+            </a:r>
+            <a:r>
+              <a:rPr sz="1600" b="1" i="0" dirty="0">
+                <a:solidFill>
+                  <a:srgbClr val="0B1C2C"/>
+                </a:solidFill>
+                <a:latin typeface="Cambria"/>
+              </a:rPr>
+              <a:t> like magic </a:t>
+            </a:r>
+            <a:r>
+              <a:rPr lang="en-US" sz="1600" b="1" i="0" dirty="0">
+                <a:solidFill>
+                  <a:srgbClr val="0B1C2C"/>
+                </a:solidFill>
+                <a:latin typeface="Cambria"/>
+              </a:rPr>
+              <a:t>to</a:t>
+            </a:r>
+            <a:r>
+              <a:rPr sz="1600" b="1" i="0" dirty="0">
+                <a:solidFill>
+                  <a:srgbClr val="0B1C2C"/>
+                </a:solidFill>
+                <a:latin typeface="Cambria"/>
+              </a:rPr>
+              <a:t> everyone else.</a:t>
             </a:r>
           </a:p>
         </p:txBody>
@@ -8894,7 +9104,7 @@
           <a:noFill/>
         </p:spPr>
         <p:txBody>
-          <a:bodyPr wrap="square" anchor="t" lIns="0" rIns="0" tIns="0" bIns="0">
+          <a:bodyPr wrap="square" lIns="0" tIns="0" rIns="0" bIns="0" anchor="t">
             <a:spAutoFit/>
           </a:bodyPr>
           <a:lstStyle/>
@@ -8953,7 +9163,7 @@
         <p:spPr>
           <a:xfrm>
             <a:off x="6035040" y="3803904"/>
-            <a:ext cx="5303520" cy="777240"/>
+            <a:ext cx="5303520" cy="433452"/>
           </a:xfrm>
           <a:prstGeom prst="rect">
             <a:avLst/>
@@ -8961,7 +9171,7 @@
           <a:noFill/>
         </p:spPr>
         <p:txBody>
-          <a:bodyPr wrap="square" anchor="t" lIns="0" rIns="0" tIns="0" bIns="0">
+          <a:bodyPr wrap="square" lIns="0" tIns="0" rIns="0" bIns="0" anchor="t">
             <a:spAutoFit/>
           </a:bodyPr>
           <a:lstStyle/>
@@ -8978,7 +9188,7 @@
               </a:spcAft>
             </a:pPr>
             <a:r>
-              <a:rPr sz="1050" b="1" i="0">
+              <a:rPr sz="1050" b="1" i="0" dirty="0">
                 <a:solidFill>
                   <a:srgbClr val="0B7A8C"/>
                 </a:solidFill>
@@ -9000,14 +9210,20 @@
               </a:spcAft>
             </a:pPr>
             <a:r>
-              <a:rPr sz="1600" b="1" i="0">
+              <a:rPr lang="en-US" sz="1600" b="1" i="0" dirty="0">
                 <a:solidFill>
                   <a:srgbClr val="0B1C2C"/>
                 </a:solidFill>
                 <a:latin typeface="Cambria"/>
               </a:rPr>
-              <a:t>So simple it feels like cheating.</a:t>
-            </a:r>
+              <a:t>Technology made simple. Growth made exponential.</a:t>
+            </a:r>
+            <a:endParaRPr sz="1600" b="1" i="0" dirty="0">
+              <a:solidFill>
+                <a:srgbClr val="0B1C2C"/>
+              </a:solidFill>
+              <a:latin typeface="Cambria"/>
+            </a:endParaRPr>
           </a:p>
         </p:txBody>
       </p:sp>
@@ -9028,7 +9244,7 @@
           <a:noFill/>
         </p:spPr>
         <p:txBody>
-          <a:bodyPr wrap="square" anchor="t" lIns="0" rIns="0" tIns="0" bIns="0">
+          <a:bodyPr wrap="square" lIns="0" tIns="0" rIns="0" bIns="0" anchor="t">
             <a:spAutoFit/>
           </a:bodyPr>
           <a:lstStyle/>
@@ -9095,7 +9311,7 @@
           <a:noFill/>
         </p:spPr>
         <p:txBody>
-          <a:bodyPr wrap="square" anchor="t" lIns="0" rIns="0" tIns="0" bIns="0">
+          <a:bodyPr wrap="square" lIns="0" tIns="0" rIns="0" bIns="0" anchor="t">
             <a:spAutoFit/>
           </a:bodyPr>
           <a:lstStyle/>
@@ -9140,7 +9356,87 @@
                 </a:solidFill>
                 <a:latin typeface="Cambria"/>
               </a:rPr>
-              <a:t>Your operations team. Your rules. Your market.</a:t>
+              <a:t>Your business team. Your rules. Your market.</a:t>
+            </a:r>
+          </a:p>
+        </p:txBody>
+      </p:sp>
+      <p:sp>
+        <p:nvSpPr>
+          <p:cNvPr id="15" name="TextBox 14"/>
+          <p:cNvSpPr txBox="1"/>
+          <p:nvPr/>
+        </p:nvSpPr>
+        <p:spPr>
+          <a:xfrm>
+            <a:off x="1143000" y="4526280"/>
+            <a:ext cx="4160520" cy="1371600"/>
+          </a:xfrm>
+          <a:prstGeom prst="rect">
+            <a:avLst/>
+          </a:prstGeom>
+          <a:noFill/>
+        </p:spPr>
+        <p:txBody>
+          <a:bodyPr wrap="square" lIns="0" rIns="0" tIns="0" bIns="0">
+            <a:spAutoFit/>
+          </a:bodyPr>
+          <a:lstStyle/>
+          <a:p>
+            <a:pPr>
+              <a:lnSpc>
+                <a:spcPct val="105000"/>
+              </a:lnSpc>
+              <a:spcAft>
+                <a:spcPts val="300"/>
+              </a:spcAft>
+            </a:pPr>
+            <a:r>
+              <a:rPr sz="1100" b="1">
+                <a:solidFill>
+                  <a:srgbClr val="FFC220"/>
+                </a:solidFill>
+                <a:latin typeface="Calibri"/>
+              </a:rPr>
+              <a:t>ALTERNATE DIRECTIONS</a:t>
+            </a:r>
+          </a:p>
+          <a:p>
+            <a:pPr>
+              <a:lnSpc>
+                <a:spcPct val="105000"/>
+              </a:lnSpc>
+              <a:spcAft>
+                <a:spcPts val="300"/>
+              </a:spcAft>
+            </a:pPr>
+            <a:r>
+              <a:rPr sz="1500" b="1">
+                <a:solidFill>
+                  <a:srgbClr val="FFFFFF"/>
+                </a:solidFill>
+                <a:latin typeface="Cambria"/>
+              </a:rPr>
+              <a:t>Simple to run. Built to grow.</a:t>
+            </a:r>
+          </a:p>
+          <a:p>
+            <a:pPr>
+              <a:lnSpc>
+                <a:spcPct val="105000"/>
+              </a:lnSpc>
+              <a:spcAft>
+                <a:spcPts val="300"/>
+              </a:spcAft>
+            </a:pPr>
+            <a:r>
+              <a:rPr sz="1500" b="1">
+                <a:solidFill>
+                  <a:srgbClr val="B9CED6"/>
+                </a:solidFill>
+                <a:latin typeface="Cambria"/>
+              </a:rPr>
+              <a:t>Simple technology. Exponential results.</a:t>
             </a:r>
           </a:p>
         </p:txBody>
@@ -9154,7 +9450,7 @@
 </file>
 
 <file path=ppt/slides/slide8.xml><?xml version="1.0" encoding="utf-8"?>
-<p:sld xmlns:a="http://schemas.openxmlformats.org/drawingml/2006/main" xmlns:p="http://schemas.openxmlformats.org/presentationml/2006/main" xmlns:r="http://schemas.openxmlformats.org/officeDocument/2006/relationships">
+<p:sld xmlns:a="http://schemas.openxmlformats.org/drawingml/2006/main" xmlns:r="http://schemas.openxmlformats.org/officeDocument/2006/relationships" xmlns:p="http://schemas.openxmlformats.org/presentationml/2006/main">
   <p:cSld>
     <p:bg>
       <p:bgPr>
@@ -9170,7 +9466,14 @@
         <p:cNvGrpSpPr/>
         <p:nvPr/>
       </p:nvGrpSpPr>
-      <p:grpSpPr/>
+      <p:grpSpPr>
+        <a:xfrm>
+          <a:off x="0" y="0"/>
+          <a:ext cx="0" cy="0"/>
+          <a:chOff x="0" y="0"/>
+          <a:chExt cx="0" cy="0"/>
+        </a:xfrm>
+      </p:grpSpPr>
       <p:sp>
         <p:nvSpPr>
           <p:cNvPr id="2" name="Rectangle 1"/>
@@ -9212,6 +9515,7 @@
           <a:lstStyle/>
           <a:p>
             <a:pPr algn="ctr"/>
+            <a:endParaRPr/>
           </a:p>
         </p:txBody>
       </p:sp>
@@ -9232,7 +9536,7 @@
           <a:noFill/>
         </p:spPr>
         <p:txBody>
-          <a:bodyPr wrap="square" anchor="t" lIns="0" rIns="0" tIns="0" bIns="0">
+          <a:bodyPr wrap="square" lIns="0" tIns="0" rIns="0" bIns="0" anchor="t">
             <a:spAutoFit/>
           </a:bodyPr>
           <a:lstStyle/>
@@ -9277,7 +9581,7 @@
           <a:noFill/>
         </p:spPr>
         <p:txBody>
-          <a:bodyPr wrap="square" anchor="t" lIns="0" rIns="0" tIns="0" bIns="0">
+          <a:bodyPr wrap="square" lIns="0" tIns="0" rIns="0" bIns="0" anchor="t">
             <a:spAutoFit/>
           </a:bodyPr>
           <a:lstStyle/>
@@ -9433,6 +9737,7 @@
           <a:lstStyle/>
           <a:p>
             <a:pPr algn="ctr"/>
+            <a:endParaRPr/>
           </a:p>
         </p:txBody>
       </p:sp>
@@ -9453,7 +9758,7 @@
           <a:noFill/>
         </p:spPr>
         <p:txBody>
-          <a:bodyPr wrap="square" anchor="t" lIns="0" rIns="0" tIns="0" bIns="0">
+          <a:bodyPr wrap="square" lIns="0" tIns="0" rIns="0" bIns="0" anchor="t">
             <a:spAutoFit/>
           </a:bodyPr>
           <a:lstStyle/>
@@ -9544,6 +9849,7 @@
           <a:lstStyle/>
           <a:p>
             <a:pPr algn="ctr"/>
+            <a:endParaRPr/>
           </a:p>
         </p:txBody>
       </p:sp>
@@ -9564,7 +9870,7 @@
           <a:noFill/>
         </p:spPr>
         <p:txBody>
-          <a:bodyPr wrap="square" anchor="t" lIns="0" rIns="0" tIns="0" bIns="0">
+          <a:bodyPr wrap="square" lIns="0" tIns="0" rIns="0" bIns="0" anchor="t">
             <a:spAutoFit/>
           </a:bodyPr>
           <a:lstStyle/>
@@ -9655,6 +9961,7 @@
           <a:lstStyle/>
           <a:p>
             <a:pPr algn="ctr"/>
+            <a:endParaRPr/>
           </a:p>
         </p:txBody>
       </p:sp>
@@ -9675,7 +9982,7 @@
           <a:noFill/>
         </p:spPr>
         <p:txBody>
-          <a:bodyPr wrap="square" anchor="t" lIns="0" rIns="0" tIns="0" bIns="0">
+          <a:bodyPr wrap="square" lIns="0" tIns="0" rIns="0" bIns="0" anchor="t">
             <a:spAutoFit/>
           </a:bodyPr>
           <a:lstStyle/>
@@ -9766,6 +10073,7 @@
           <a:lstStyle/>
           <a:p>
             <a:pPr algn="ctr"/>
+            <a:endParaRPr/>
           </a:p>
         </p:txBody>
       </p:sp>
@@ -9786,7 +10094,7 @@
           <a:noFill/>
         </p:spPr>
         <p:txBody>
-          <a:bodyPr wrap="square" anchor="t" lIns="0" rIns="0" tIns="0" bIns="0">
+          <a:bodyPr wrap="square" lIns="0" tIns="0" rIns="0" bIns="0" anchor="t">
             <a:spAutoFit/>
           </a:bodyPr>
           <a:lstStyle/>
@@ -9877,6 +10185,7 @@
           <a:lstStyle/>
           <a:p>
             <a:pPr algn="ctr"/>
+            <a:endParaRPr/>
           </a:p>
         </p:txBody>
       </p:sp>
@@ -9897,7 +10206,7 @@
           <a:noFill/>
         </p:spPr>
         <p:txBody>
-          <a:bodyPr wrap="square" anchor="t" lIns="0" rIns="0" tIns="0" bIns="0">
+          <a:bodyPr wrap="square" lIns="0" tIns="0" rIns="0" bIns="0" anchor="t">
             <a:spAutoFit/>
           </a:bodyPr>
           <a:lstStyle/>
@@ -9988,6 +10297,7 @@
           <a:lstStyle/>
           <a:p>
             <a:pPr algn="ctr"/>
+            <a:endParaRPr/>
           </a:p>
         </p:txBody>
       </p:sp>
@@ -10008,7 +10318,7 @@
           <a:noFill/>
         </p:spPr>
         <p:txBody>
-          <a:bodyPr wrap="square" anchor="t" lIns="0" rIns="0" tIns="0" bIns="0">
+          <a:bodyPr wrap="square" lIns="0" tIns="0" rIns="0" bIns="0" anchor="t">
             <a:spAutoFit/>
           </a:bodyPr>
           <a:lstStyle/>
@@ -10101,6 +10411,7 @@
           <a:lstStyle/>
           <a:p>
             <a:pPr algn="ctr"/>
+            <a:endParaRPr/>
           </a:p>
         </p:txBody>
       </p:sp>
@@ -10121,7 +10432,7 @@
           <a:noFill/>
         </p:spPr>
         <p:txBody>
-          <a:bodyPr wrap="square" anchor="t" lIns="0" rIns="0" tIns="0" bIns="0">
+          <a:bodyPr wrap="square" lIns="0" tIns="0" rIns="0" bIns="0" anchor="t">
             <a:spAutoFit/>
           </a:bodyPr>
           <a:lstStyle/>
@@ -10188,7 +10499,7 @@
           <a:noFill/>
         </p:spPr>
         <p:txBody>
-          <a:bodyPr wrap="square" anchor="t" lIns="0" rIns="0" tIns="0" bIns="0">
+          <a:bodyPr wrap="square" lIns="0" tIns="0" rIns="0" bIns="0" anchor="t">
             <a:spAutoFit/>
           </a:bodyPr>
           <a:lstStyle/>
@@ -10257,6 +10568,7 @@
           <a:lstStyle/>
           <a:p>
             <a:pPr algn="ctr"/>
+            <a:endParaRPr/>
           </a:p>
         </p:txBody>
       </p:sp>
@@ -10277,7 +10589,7 @@
           <a:noFill/>
         </p:spPr>
         <p:txBody>
-          <a:bodyPr wrap="square" anchor="t" lIns="0" rIns="0" tIns="0" bIns="0">
+          <a:bodyPr wrap="square" lIns="0" tIns="0" rIns="0" bIns="0" anchor="t">
             <a:spAutoFit/>
           </a:bodyPr>
           <a:lstStyle/>
@@ -10362,7 +10674,7 @@
           <a:noFill/>
         </p:spPr>
         <p:txBody>
-          <a:bodyPr wrap="square" anchor="ctr" lIns="0" rIns="0" tIns="0" bIns="0">
+          <a:bodyPr wrap="square" lIns="0" tIns="0" rIns="0" bIns="0" anchor="ctr">
             <a:spAutoFit/>
           </a:bodyPr>
           <a:lstStyle/>
